--- a/presentacion/2_proceso_invasion.pptx
+++ b/presentacion/2_proceso_invasion.pptx
@@ -276,7 +276,7 @@
           <a:p>
             <a:fld id="{46EE7727-541D-0A41-A3A6-75CC084A351C}" type="datetimeFigureOut">
               <a:rPr lang="es-ES" smtClean="0"/>
-              <a:t>19/1/26</a:t>
+              <a:t>20/1/26</a:t>
             </a:fld>
             <a:endParaRPr lang="es-ES"/>
           </a:p>
@@ -318,7 +318,7 @@
           <a:p>
             <a:fld id="{D9FB19B3-EF3F-6241-85E8-56F1CA86FEDE}" type="slidenum">
               <a:rPr lang="es-ES" smtClean="0"/>
-              <a:t>‹#›</a:t>
+              <a:t>‹Nº›</a:t>
             </a:fld>
             <a:endParaRPr lang="es-ES"/>
           </a:p>
@@ -446,7 +446,7 @@
           <a:p>
             <a:fld id="{46EE7727-541D-0A41-A3A6-75CC084A351C}" type="datetimeFigureOut">
               <a:rPr lang="es-ES" smtClean="0"/>
-              <a:t>19/1/26</a:t>
+              <a:t>20/1/26</a:t>
             </a:fld>
             <a:endParaRPr lang="es-ES"/>
           </a:p>
@@ -488,7 +488,7 @@
           <a:p>
             <a:fld id="{D9FB19B3-EF3F-6241-85E8-56F1CA86FEDE}" type="slidenum">
               <a:rPr lang="es-ES" smtClean="0"/>
-              <a:t>‹#›</a:t>
+              <a:t>‹Nº›</a:t>
             </a:fld>
             <a:endParaRPr lang="es-ES"/>
           </a:p>
@@ -626,7 +626,7 @@
           <a:p>
             <a:fld id="{46EE7727-541D-0A41-A3A6-75CC084A351C}" type="datetimeFigureOut">
               <a:rPr lang="es-ES" smtClean="0"/>
-              <a:t>19/1/26</a:t>
+              <a:t>20/1/26</a:t>
             </a:fld>
             <a:endParaRPr lang="es-ES"/>
           </a:p>
@@ -668,7 +668,7 @@
           <a:p>
             <a:fld id="{D9FB19B3-EF3F-6241-85E8-56F1CA86FEDE}" type="slidenum">
               <a:rPr lang="es-ES" smtClean="0"/>
-              <a:t>‹#›</a:t>
+              <a:t>‹Nº›</a:t>
             </a:fld>
             <a:endParaRPr lang="es-ES"/>
           </a:p>
@@ -796,7 +796,7 @@
           <a:p>
             <a:fld id="{46EE7727-541D-0A41-A3A6-75CC084A351C}" type="datetimeFigureOut">
               <a:rPr lang="es-ES" smtClean="0"/>
-              <a:t>19/1/26</a:t>
+              <a:t>20/1/26</a:t>
             </a:fld>
             <a:endParaRPr lang="es-ES"/>
           </a:p>
@@ -838,7 +838,7 @@
           <a:p>
             <a:fld id="{D9FB19B3-EF3F-6241-85E8-56F1CA86FEDE}" type="slidenum">
               <a:rPr lang="es-ES" smtClean="0"/>
-              <a:t>‹#›</a:t>
+              <a:t>‹Nº›</a:t>
             </a:fld>
             <a:endParaRPr lang="es-ES"/>
           </a:p>
@@ -1042,7 +1042,7 @@
           <a:p>
             <a:fld id="{46EE7727-541D-0A41-A3A6-75CC084A351C}" type="datetimeFigureOut">
               <a:rPr lang="es-ES" smtClean="0"/>
-              <a:t>19/1/26</a:t>
+              <a:t>20/1/26</a:t>
             </a:fld>
             <a:endParaRPr lang="es-ES"/>
           </a:p>
@@ -1084,7 +1084,7 @@
           <a:p>
             <a:fld id="{D9FB19B3-EF3F-6241-85E8-56F1CA86FEDE}" type="slidenum">
               <a:rPr lang="es-ES" smtClean="0"/>
-              <a:t>‹#›</a:t>
+              <a:t>‹Nº›</a:t>
             </a:fld>
             <a:endParaRPr lang="es-ES"/>
           </a:p>
@@ -1274,7 +1274,7 @@
           <a:p>
             <a:fld id="{46EE7727-541D-0A41-A3A6-75CC084A351C}" type="datetimeFigureOut">
               <a:rPr lang="es-ES" smtClean="0"/>
-              <a:t>19/1/26</a:t>
+              <a:t>20/1/26</a:t>
             </a:fld>
             <a:endParaRPr lang="es-ES"/>
           </a:p>
@@ -1316,7 +1316,7 @@
           <a:p>
             <a:fld id="{D9FB19B3-EF3F-6241-85E8-56F1CA86FEDE}" type="slidenum">
               <a:rPr lang="es-ES" smtClean="0"/>
-              <a:t>‹#›</a:t>
+              <a:t>‹Nº›</a:t>
             </a:fld>
             <a:endParaRPr lang="es-ES"/>
           </a:p>
@@ -1641,7 +1641,7 @@
           <a:p>
             <a:fld id="{46EE7727-541D-0A41-A3A6-75CC084A351C}" type="datetimeFigureOut">
               <a:rPr lang="es-ES" smtClean="0"/>
-              <a:t>19/1/26</a:t>
+              <a:t>20/1/26</a:t>
             </a:fld>
             <a:endParaRPr lang="es-ES"/>
           </a:p>
@@ -1683,7 +1683,7 @@
           <a:p>
             <a:fld id="{D9FB19B3-EF3F-6241-85E8-56F1CA86FEDE}" type="slidenum">
               <a:rPr lang="es-ES" smtClean="0"/>
-              <a:t>‹#›</a:t>
+              <a:t>‹Nº›</a:t>
             </a:fld>
             <a:endParaRPr lang="es-ES"/>
           </a:p>
@@ -1759,7 +1759,7 @@
           <a:p>
             <a:fld id="{46EE7727-541D-0A41-A3A6-75CC084A351C}" type="datetimeFigureOut">
               <a:rPr lang="es-ES" smtClean="0"/>
-              <a:t>19/1/26</a:t>
+              <a:t>20/1/26</a:t>
             </a:fld>
             <a:endParaRPr lang="es-ES"/>
           </a:p>
@@ -1801,7 +1801,7 @@
           <a:p>
             <a:fld id="{D9FB19B3-EF3F-6241-85E8-56F1CA86FEDE}" type="slidenum">
               <a:rPr lang="es-ES" smtClean="0"/>
-              <a:t>‹#›</a:t>
+              <a:t>‹Nº›</a:t>
             </a:fld>
             <a:endParaRPr lang="es-ES"/>
           </a:p>
@@ -1854,7 +1854,7 @@
           <a:p>
             <a:fld id="{46EE7727-541D-0A41-A3A6-75CC084A351C}" type="datetimeFigureOut">
               <a:rPr lang="es-ES" smtClean="0"/>
-              <a:t>19/1/26</a:t>
+              <a:t>20/1/26</a:t>
             </a:fld>
             <a:endParaRPr lang="es-ES"/>
           </a:p>
@@ -1896,7 +1896,7 @@
           <a:p>
             <a:fld id="{D9FB19B3-EF3F-6241-85E8-56F1CA86FEDE}" type="slidenum">
               <a:rPr lang="es-ES" smtClean="0"/>
-              <a:t>‹#›</a:t>
+              <a:t>‹Nº›</a:t>
             </a:fld>
             <a:endParaRPr lang="es-ES"/>
           </a:p>
@@ -2131,7 +2131,7 @@
           <a:p>
             <a:fld id="{46EE7727-541D-0A41-A3A6-75CC084A351C}" type="datetimeFigureOut">
               <a:rPr lang="es-ES" smtClean="0"/>
-              <a:t>19/1/26</a:t>
+              <a:t>20/1/26</a:t>
             </a:fld>
             <a:endParaRPr lang="es-ES"/>
           </a:p>
@@ -2173,7 +2173,7 @@
           <a:p>
             <a:fld id="{D9FB19B3-EF3F-6241-85E8-56F1CA86FEDE}" type="slidenum">
               <a:rPr lang="es-ES" smtClean="0"/>
-              <a:t>‹#›</a:t>
+              <a:t>‹Nº›</a:t>
             </a:fld>
             <a:endParaRPr lang="es-ES"/>
           </a:p>
@@ -2388,7 +2388,7 @@
           <a:p>
             <a:fld id="{46EE7727-541D-0A41-A3A6-75CC084A351C}" type="datetimeFigureOut">
               <a:rPr lang="es-ES" smtClean="0"/>
-              <a:t>19/1/26</a:t>
+              <a:t>20/1/26</a:t>
             </a:fld>
             <a:endParaRPr lang="es-ES"/>
           </a:p>
@@ -2430,7 +2430,7 @@
           <a:p>
             <a:fld id="{D9FB19B3-EF3F-6241-85E8-56F1CA86FEDE}" type="slidenum">
               <a:rPr lang="es-ES" smtClean="0"/>
-              <a:t>‹#›</a:t>
+              <a:t>‹Nº›</a:t>
             </a:fld>
             <a:endParaRPr lang="es-ES"/>
           </a:p>
@@ -2601,7 +2601,7 @@
           <a:p>
             <a:fld id="{46EE7727-541D-0A41-A3A6-75CC084A351C}" type="datetimeFigureOut">
               <a:rPr lang="es-ES" smtClean="0"/>
-              <a:t>19/1/26</a:t>
+              <a:t>20/1/26</a:t>
             </a:fld>
             <a:endParaRPr lang="es-ES"/>
           </a:p>
@@ -2679,7 +2679,7 @@
           <a:p>
             <a:fld id="{D9FB19B3-EF3F-6241-85E8-56F1CA86FEDE}" type="slidenum">
               <a:rPr lang="es-ES" smtClean="0"/>
-              <a:t>‹#›</a:t>
+              <a:t>‹Nº›</a:t>
             </a:fld>
             <a:endParaRPr lang="es-ES"/>
           </a:p>
@@ -3904,6 +3904,1101 @@
           </a:p>
         </p:txBody>
       </p:sp>
+      <p:sp>
+        <p:nvSpPr>
+          <p:cNvPr id="4" name="AutoShape 4" descr="Factsheet - Acacia spondylophylla">
+            <a:extLst>
+              <a:ext uri="{FF2B5EF4-FFF2-40B4-BE49-F238E27FC236}">
+                <a16:creationId xmlns:a16="http://schemas.microsoft.com/office/drawing/2014/main" id="{6F4E329D-D213-8BD3-4759-FA5E3376C408}"/>
+              </a:ext>
+            </a:extLst>
+          </p:cNvPr>
+          <p:cNvSpPr>
+            <a:spLocks noChangeAspect="1" noChangeArrowheads="1"/>
+          </p:cNvSpPr>
+          <p:nvPr/>
+        </p:nvSpPr>
+        <p:spPr bwMode="auto">
+          <a:xfrm>
+            <a:off x="4874698" y="3161371"/>
+            <a:ext cx="304800" cy="304800"/>
+          </a:xfrm>
+          <a:prstGeom prst="rect">
+            <a:avLst/>
+          </a:prstGeom>
+          <a:noFill/>
+          <a:extLst>
+            <a:ext uri="{909E8E84-426E-40DD-AFC4-6F175D3DCCD1}">
+              <a14:hiddenFill xmlns:a14="http://schemas.microsoft.com/office/drawing/2010/main">
+                <a:solidFill>
+                  <a:srgbClr val="FFFFFF"/>
+                </a:solidFill>
+              </a14:hiddenFill>
+            </a:ext>
+          </a:extLst>
+        </p:spPr>
+        <p:txBody>
+          <a:bodyPr vert="horz" wrap="square" lIns="91440" tIns="45720" rIns="91440" bIns="45720" numCol="1" anchor="t" anchorCtr="0" compatLnSpc="1">
+            <a:prstTxWarp prst="textNoShape">
+              <a:avLst/>
+            </a:prstTxWarp>
+          </a:bodyPr>
+          <a:lstStyle/>
+          <a:p>
+            <a:endParaRPr lang="es-ES"/>
+          </a:p>
+        </p:txBody>
+      </p:sp>
+      <p:grpSp>
+        <p:nvGrpSpPr>
+          <p:cNvPr id="8" name="Grupo 7">
+            <a:extLst>
+              <a:ext uri="{FF2B5EF4-FFF2-40B4-BE49-F238E27FC236}">
+                <a16:creationId xmlns:a16="http://schemas.microsoft.com/office/drawing/2014/main" id="{B3EA5B12-BFED-F2F4-1E23-927C59EABA1F}"/>
+              </a:ext>
+            </a:extLst>
+          </p:cNvPr>
+          <p:cNvGrpSpPr/>
+          <p:nvPr/>
+        </p:nvGrpSpPr>
+        <p:grpSpPr>
+          <a:xfrm>
+            <a:off x="106441" y="1160475"/>
+            <a:ext cx="5378832" cy="3162808"/>
+            <a:chOff x="8954268" y="1393682"/>
+            <a:chExt cx="5378832" cy="3162808"/>
+          </a:xfrm>
+        </p:grpSpPr>
+        <p:sp>
+          <p:nvSpPr>
+            <p:cNvPr id="7" name="Rectángulo 6">
+              <a:extLst>
+                <a:ext uri="{FF2B5EF4-FFF2-40B4-BE49-F238E27FC236}">
+                  <a16:creationId xmlns:a16="http://schemas.microsoft.com/office/drawing/2014/main" id="{1B976E61-0145-DF4F-FCB3-5EF312124DC0}"/>
+                </a:ext>
+              </a:extLst>
+            </p:cNvPr>
+            <p:cNvSpPr/>
+            <p:nvPr/>
+          </p:nvSpPr>
+          <p:spPr>
+            <a:xfrm>
+              <a:off x="8954268" y="1393682"/>
+              <a:ext cx="5378832" cy="3162808"/>
+            </a:xfrm>
+            <a:prstGeom prst="rect">
+              <a:avLst/>
+            </a:prstGeom>
+            <a:solidFill>
+              <a:schemeClr val="bg1"/>
+            </a:solidFill>
+          </p:spPr>
+          <p:style>
+            <a:lnRef idx="2">
+              <a:schemeClr val="accent1">
+                <a:shade val="15000"/>
+              </a:schemeClr>
+            </a:lnRef>
+            <a:fillRef idx="1">
+              <a:schemeClr val="accent1"/>
+            </a:fillRef>
+            <a:effectRef idx="0">
+              <a:schemeClr val="accent1"/>
+            </a:effectRef>
+            <a:fontRef idx="minor">
+              <a:schemeClr val="lt1"/>
+            </a:fontRef>
+          </p:style>
+          <p:txBody>
+            <a:bodyPr rtlCol="0" anchor="ctr"/>
+            <a:lstStyle/>
+            <a:p>
+              <a:pPr algn="ctr"/>
+              <a:endParaRPr lang="es-ES" dirty="0"/>
+            </a:p>
+          </p:txBody>
+        </p:sp>
+        <p:grpSp>
+          <p:nvGrpSpPr>
+            <p:cNvPr id="5" name="Grupo 4">
+              <a:extLst>
+                <a:ext uri="{FF2B5EF4-FFF2-40B4-BE49-F238E27FC236}">
+                  <a16:creationId xmlns:a16="http://schemas.microsoft.com/office/drawing/2014/main" id="{EFA4AA07-FF35-F0F7-A1C9-37C856FB7358}"/>
+                </a:ext>
+              </a:extLst>
+            </p:cNvPr>
+            <p:cNvGrpSpPr/>
+            <p:nvPr/>
+          </p:nvGrpSpPr>
+          <p:grpSpPr>
+            <a:xfrm>
+              <a:off x="9197919" y="1619565"/>
+              <a:ext cx="4847195" cy="2678440"/>
+              <a:chOff x="1428457" y="389462"/>
+              <a:chExt cx="4847195" cy="2678440"/>
+            </a:xfrm>
+          </p:grpSpPr>
+          <p:sp>
+            <p:nvSpPr>
+              <p:cNvPr id="3" name="CuadroTexto 2">
+                <a:extLst>
+                  <a:ext uri="{FF2B5EF4-FFF2-40B4-BE49-F238E27FC236}">
+                    <a16:creationId xmlns:a16="http://schemas.microsoft.com/office/drawing/2014/main" id="{783048B1-AFEC-2957-65A9-090E586A8580}"/>
+                  </a:ext>
+                </a:extLst>
+              </p:cNvPr>
+              <p:cNvSpPr txBox="1"/>
+              <p:nvPr/>
+            </p:nvSpPr>
+            <p:spPr>
+              <a:xfrm>
+                <a:off x="2695237" y="389462"/>
+                <a:ext cx="2628597" cy="369332"/>
+              </a:xfrm>
+              <a:prstGeom prst="rect">
+                <a:avLst/>
+              </a:prstGeom>
+              <a:noFill/>
+            </p:spPr>
+            <p:txBody>
+              <a:bodyPr wrap="square">
+                <a:spAutoFit/>
+              </a:bodyPr>
+              <a:lstStyle/>
+              <a:p>
+                <a:pPr algn="ctr"/>
+                <a:r>
+                  <a:rPr lang="es-ES" b="1" i="1" dirty="0"/>
+                  <a:t>Acacia </a:t>
+                </a:r>
+                <a:r>
+                  <a:rPr lang="es-ES" b="1" i="1" dirty="0" err="1"/>
+                  <a:t>spondylophylla</a:t>
+                </a:r>
+                <a:endParaRPr lang="es-ES" dirty="0"/>
+              </a:p>
+            </p:txBody>
+          </p:sp>
+          <p:pic>
+            <p:nvPicPr>
+              <p:cNvPr id="1026" name="Picture 2" descr="Factsheet - Acacia spondylophylla">
+                <a:extLst>
+                  <a:ext uri="{FF2B5EF4-FFF2-40B4-BE49-F238E27FC236}">
+                    <a16:creationId xmlns:a16="http://schemas.microsoft.com/office/drawing/2014/main" id="{AD3A276F-AF29-0595-7EEE-555A18B2E14D}"/>
+                  </a:ext>
+                </a:extLst>
+              </p:cNvPr>
+              <p:cNvPicPr>
+                <a:picLocks noChangeAspect="1" noChangeArrowheads="1"/>
+              </p:cNvPicPr>
+              <p:nvPr/>
+            </p:nvPicPr>
+            <p:blipFill>
+              <a:blip r:embed="rId3">
+                <a:extLst>
+                  <a:ext uri="{28A0092B-C50C-407E-A947-70E740481C1C}">
+                    <a14:useLocalDpi xmlns:a14="http://schemas.microsoft.com/office/drawing/2010/main" val="0"/>
+                  </a:ext>
+                </a:extLst>
+              </a:blip>
+              <a:srcRect/>
+              <a:stretch>
+                <a:fillRect/>
+              </a:stretch>
+            </p:blipFill>
+            <p:spPr bwMode="auto">
+              <a:xfrm>
+                <a:off x="1428457" y="867768"/>
+                <a:ext cx="3302658" cy="2187074"/>
+              </a:xfrm>
+              <a:prstGeom prst="rect">
+                <a:avLst/>
+              </a:prstGeom>
+              <a:noFill/>
+              <a:extLst>
+                <a:ext uri="{909E8E84-426E-40DD-AFC4-6F175D3DCCD1}">
+                  <a14:hiddenFill xmlns:a14="http://schemas.microsoft.com/office/drawing/2010/main">
+                    <a:solidFill>
+                      <a:srgbClr val="FFFFFF"/>
+                    </a:solidFill>
+                  </a14:hiddenFill>
+                </a:ext>
+              </a:extLst>
+            </p:spPr>
+          </p:pic>
+          <p:pic>
+            <p:nvPicPr>
+              <p:cNvPr id="1030" name="Picture 6" descr="Factsheet - Acacia spondylophylla">
+                <a:extLst>
+                  <a:ext uri="{FF2B5EF4-FFF2-40B4-BE49-F238E27FC236}">
+                    <a16:creationId xmlns:a16="http://schemas.microsoft.com/office/drawing/2014/main" id="{11953449-2B29-834C-089D-729ADE8EFC70}"/>
+                  </a:ext>
+                </a:extLst>
+              </p:cNvPr>
+              <p:cNvPicPr>
+                <a:picLocks noChangeAspect="1" noChangeArrowheads="1"/>
+              </p:cNvPicPr>
+              <p:nvPr/>
+            </p:nvPicPr>
+            <p:blipFill>
+              <a:blip r:embed="rId4">
+                <a:extLst>
+                  <a:ext uri="{28A0092B-C50C-407E-A947-70E740481C1C}">
+                    <a14:useLocalDpi xmlns:a14="http://schemas.microsoft.com/office/drawing/2010/main" val="0"/>
+                  </a:ext>
+                </a:extLst>
+              </a:blip>
+              <a:srcRect/>
+              <a:stretch>
+                <a:fillRect/>
+              </a:stretch>
+            </p:blipFill>
+            <p:spPr bwMode="auto">
+              <a:xfrm>
+                <a:off x="4799380" y="889403"/>
+                <a:ext cx="1476272" cy="2178499"/>
+              </a:xfrm>
+              <a:prstGeom prst="rect">
+                <a:avLst/>
+              </a:prstGeom>
+              <a:noFill/>
+              <a:extLst>
+                <a:ext uri="{909E8E84-426E-40DD-AFC4-6F175D3DCCD1}">
+                  <a14:hiddenFill xmlns:a14="http://schemas.microsoft.com/office/drawing/2010/main">
+                    <a:solidFill>
+                      <a:srgbClr val="FFFFFF"/>
+                    </a:solidFill>
+                  </a14:hiddenFill>
+                </a:ext>
+              </a:extLst>
+            </p:spPr>
+          </p:pic>
+        </p:grpSp>
+      </p:grpSp>
+      <p:grpSp>
+        <p:nvGrpSpPr>
+          <p:cNvPr id="35" name="Grupo 34">
+            <a:extLst>
+              <a:ext uri="{FF2B5EF4-FFF2-40B4-BE49-F238E27FC236}">
+                <a16:creationId xmlns:a16="http://schemas.microsoft.com/office/drawing/2014/main" id="{DB645991-A93B-FF5C-8415-4C1AB77AB8CA}"/>
+              </a:ext>
+            </a:extLst>
+          </p:cNvPr>
+          <p:cNvGrpSpPr/>
+          <p:nvPr/>
+        </p:nvGrpSpPr>
+        <p:grpSpPr>
+          <a:xfrm>
+            <a:off x="763270" y="1969352"/>
+            <a:ext cx="3273041" cy="2534702"/>
+            <a:chOff x="3206137" y="269449"/>
+            <a:chExt cx="3273041" cy="2534702"/>
+          </a:xfrm>
+        </p:grpSpPr>
+        <p:sp>
+          <p:nvSpPr>
+            <p:cNvPr id="34" name="Rectángulo 33">
+              <a:extLst>
+                <a:ext uri="{FF2B5EF4-FFF2-40B4-BE49-F238E27FC236}">
+                  <a16:creationId xmlns:a16="http://schemas.microsoft.com/office/drawing/2014/main" id="{86C37218-266A-F9E0-A493-6B278E17B775}"/>
+                </a:ext>
+              </a:extLst>
+            </p:cNvPr>
+            <p:cNvSpPr/>
+            <p:nvPr/>
+          </p:nvSpPr>
+          <p:spPr>
+            <a:xfrm>
+              <a:off x="3206137" y="269449"/>
+              <a:ext cx="3273041" cy="2534702"/>
+            </a:xfrm>
+            <a:prstGeom prst="rect">
+              <a:avLst/>
+            </a:prstGeom>
+            <a:solidFill>
+              <a:schemeClr val="bg1"/>
+            </a:solidFill>
+          </p:spPr>
+          <p:style>
+            <a:lnRef idx="2">
+              <a:schemeClr val="accent1">
+                <a:shade val="15000"/>
+              </a:schemeClr>
+            </a:lnRef>
+            <a:fillRef idx="1">
+              <a:schemeClr val="accent1"/>
+            </a:fillRef>
+            <a:effectRef idx="0">
+              <a:schemeClr val="accent1"/>
+            </a:effectRef>
+            <a:fontRef idx="minor">
+              <a:schemeClr val="lt1"/>
+            </a:fontRef>
+          </p:style>
+          <p:txBody>
+            <a:bodyPr rtlCol="0" anchor="ctr"/>
+            <a:lstStyle/>
+            <a:p>
+              <a:pPr algn="ctr"/>
+              <a:endParaRPr lang="es-ES" dirty="0"/>
+            </a:p>
+          </p:txBody>
+        </p:sp>
+        <p:pic>
+          <p:nvPicPr>
+            <p:cNvPr id="15" name="Imagen 14" descr="Animal con la boca abierta&#10;&#10;Descripción generada automáticamente con confianza media">
+              <a:extLst>
+                <a:ext uri="{FF2B5EF4-FFF2-40B4-BE49-F238E27FC236}">
+                  <a16:creationId xmlns:a16="http://schemas.microsoft.com/office/drawing/2014/main" id="{C7069F80-217D-30FE-E910-A9D87A959F74}"/>
+                </a:ext>
+              </a:extLst>
+            </p:cNvPr>
+            <p:cNvPicPr>
+              <a:picLocks noChangeAspect="1"/>
+            </p:cNvPicPr>
+            <p:nvPr/>
+          </p:nvPicPr>
+          <p:blipFill>
+            <a:blip r:embed="rId5"/>
+            <a:stretch>
+              <a:fillRect/>
+            </a:stretch>
+          </p:blipFill>
+          <p:spPr>
+            <a:xfrm>
+              <a:off x="3423302" y="669803"/>
+              <a:ext cx="2812959" cy="1926776"/>
+            </a:xfrm>
+            <a:prstGeom prst="rect">
+              <a:avLst/>
+            </a:prstGeom>
+          </p:spPr>
+        </p:pic>
+        <p:sp>
+          <p:nvSpPr>
+            <p:cNvPr id="22" name="CuadroTexto 21">
+              <a:extLst>
+                <a:ext uri="{FF2B5EF4-FFF2-40B4-BE49-F238E27FC236}">
+                  <a16:creationId xmlns:a16="http://schemas.microsoft.com/office/drawing/2014/main" id="{D5D4F767-6C7B-B373-61F1-2AA41A0C9D49}"/>
+                </a:ext>
+              </a:extLst>
+            </p:cNvPr>
+            <p:cNvSpPr txBox="1"/>
+            <p:nvPr/>
+          </p:nvSpPr>
+          <p:spPr>
+            <a:xfrm>
+              <a:off x="3587841" y="320262"/>
+              <a:ext cx="2812959" cy="369332"/>
+            </a:xfrm>
+            <a:prstGeom prst="rect">
+              <a:avLst/>
+            </a:prstGeom>
+            <a:noFill/>
+          </p:spPr>
+          <p:txBody>
+            <a:bodyPr wrap="square">
+              <a:spAutoFit/>
+            </a:bodyPr>
+            <a:lstStyle/>
+            <a:p>
+              <a:r>
+                <a:rPr lang="es-ES" sz="1800" b="1" i="1" dirty="0" err="1">
+                  <a:solidFill>
+                    <a:srgbClr val="050707"/>
+                  </a:solidFill>
+                  <a:effectLst/>
+                  <a:latin typeface="Helvetica" pitchFamily="2" charset="0"/>
+                </a:rPr>
+                <a:t>Temnocerus</a:t>
+              </a:r>
+              <a:r>
+                <a:rPr lang="es-ES" sz="1800" b="1" i="1" dirty="0">
+                  <a:solidFill>
+                    <a:srgbClr val="050707"/>
+                  </a:solidFill>
+                  <a:effectLst/>
+                  <a:latin typeface="Helvetica" pitchFamily="2" charset="0"/>
+                </a:rPr>
+                <a:t> </a:t>
+              </a:r>
+              <a:r>
+                <a:rPr lang="es-ES" sz="1800" b="1" i="1" dirty="0" err="1">
+                  <a:solidFill>
+                    <a:srgbClr val="050707"/>
+                  </a:solidFill>
+                  <a:effectLst/>
+                  <a:latin typeface="Helvetica" pitchFamily="2" charset="0"/>
+                </a:rPr>
+                <a:t>debilis</a:t>
+              </a:r>
+              <a:r>
+                <a:rPr lang="es-ES" sz="1800" b="1" i="1" dirty="0">
+                  <a:solidFill>
+                    <a:srgbClr val="050707"/>
+                  </a:solidFill>
+                  <a:effectLst/>
+                  <a:latin typeface="Helvetica" pitchFamily="2" charset="0"/>
+                </a:rPr>
+                <a:t> </a:t>
+              </a:r>
+              <a:endParaRPr lang="es-ES" b="1" dirty="0">
+                <a:effectLst/>
+              </a:endParaRPr>
+            </a:p>
+          </p:txBody>
+        </p:sp>
+      </p:grpSp>
+      <p:grpSp>
+        <p:nvGrpSpPr>
+          <p:cNvPr id="39" name="Grupo 38">
+            <a:extLst>
+              <a:ext uri="{FF2B5EF4-FFF2-40B4-BE49-F238E27FC236}">
+                <a16:creationId xmlns:a16="http://schemas.microsoft.com/office/drawing/2014/main" id="{B4D28EE2-ECFF-13BC-FF05-D931762D07E0}"/>
+              </a:ext>
+            </a:extLst>
+          </p:cNvPr>
+          <p:cNvGrpSpPr/>
+          <p:nvPr/>
+        </p:nvGrpSpPr>
+        <p:grpSpPr>
+          <a:xfrm>
+            <a:off x="3789677" y="1726209"/>
+            <a:ext cx="3449630" cy="3007686"/>
+            <a:chOff x="1944690" y="397159"/>
+            <a:chExt cx="3449630" cy="3007686"/>
+          </a:xfrm>
+        </p:grpSpPr>
+        <p:sp>
+          <p:nvSpPr>
+            <p:cNvPr id="38" name="Rectángulo 37">
+              <a:extLst>
+                <a:ext uri="{FF2B5EF4-FFF2-40B4-BE49-F238E27FC236}">
+                  <a16:creationId xmlns:a16="http://schemas.microsoft.com/office/drawing/2014/main" id="{AE4BE964-2EA8-3288-5000-AAE121C326EB}"/>
+                </a:ext>
+              </a:extLst>
+            </p:cNvPr>
+            <p:cNvSpPr/>
+            <p:nvPr/>
+          </p:nvSpPr>
+          <p:spPr>
+            <a:xfrm>
+              <a:off x="1944690" y="397159"/>
+              <a:ext cx="3449630" cy="3007686"/>
+            </a:xfrm>
+            <a:prstGeom prst="rect">
+              <a:avLst/>
+            </a:prstGeom>
+            <a:solidFill>
+              <a:schemeClr val="bg1"/>
+            </a:solidFill>
+          </p:spPr>
+          <p:style>
+            <a:lnRef idx="2">
+              <a:schemeClr val="accent1">
+                <a:shade val="15000"/>
+              </a:schemeClr>
+            </a:lnRef>
+            <a:fillRef idx="1">
+              <a:schemeClr val="accent1"/>
+            </a:fillRef>
+            <a:effectRef idx="0">
+              <a:schemeClr val="accent1"/>
+            </a:effectRef>
+            <a:fontRef idx="minor">
+              <a:schemeClr val="lt1"/>
+            </a:fontRef>
+          </p:style>
+          <p:txBody>
+            <a:bodyPr rtlCol="0" anchor="ctr"/>
+            <a:lstStyle/>
+            <a:p>
+              <a:pPr algn="ctr"/>
+              <a:endParaRPr lang="es-ES" dirty="0"/>
+            </a:p>
+          </p:txBody>
+        </p:sp>
+        <p:pic>
+          <p:nvPicPr>
+            <p:cNvPr id="1032" name="Picture 8" descr="género Sibinia · iNaturalist Chile">
+              <a:extLst>
+                <a:ext uri="{FF2B5EF4-FFF2-40B4-BE49-F238E27FC236}">
+                  <a16:creationId xmlns:a16="http://schemas.microsoft.com/office/drawing/2014/main" id="{BDF55DD6-5C87-1853-EA23-02D3C2E8C8E8}"/>
+                </a:ext>
+              </a:extLst>
+            </p:cNvPr>
+            <p:cNvPicPr>
+              <a:picLocks noChangeAspect="1" noChangeArrowheads="1"/>
+            </p:cNvPicPr>
+            <p:nvPr/>
+          </p:nvPicPr>
+          <p:blipFill>
+            <a:blip r:embed="rId6">
+              <a:extLst>
+                <a:ext uri="{28A0092B-C50C-407E-A947-70E740481C1C}">
+                  <a14:useLocalDpi xmlns:a14="http://schemas.microsoft.com/office/drawing/2010/main" val="0"/>
+                </a:ext>
+              </a:extLst>
+            </a:blip>
+            <a:srcRect/>
+            <a:stretch>
+              <a:fillRect/>
+            </a:stretch>
+          </p:blipFill>
+          <p:spPr bwMode="auto">
+            <a:xfrm>
+              <a:off x="2065250" y="934293"/>
+              <a:ext cx="3175000" cy="2114550"/>
+            </a:xfrm>
+            <a:prstGeom prst="rect">
+              <a:avLst/>
+            </a:prstGeom>
+            <a:noFill/>
+            <a:extLst>
+              <a:ext uri="{909E8E84-426E-40DD-AFC4-6F175D3DCCD1}">
+                <a14:hiddenFill xmlns:a14="http://schemas.microsoft.com/office/drawing/2010/main">
+                  <a:solidFill>
+                    <a:srgbClr val="FFFFFF"/>
+                  </a:solidFill>
+                </a14:hiddenFill>
+              </a:ext>
+            </a:extLst>
+          </p:spPr>
+        </p:pic>
+        <p:sp>
+          <p:nvSpPr>
+            <p:cNvPr id="37" name="CuadroTexto 36">
+              <a:extLst>
+                <a:ext uri="{FF2B5EF4-FFF2-40B4-BE49-F238E27FC236}">
+                  <a16:creationId xmlns:a16="http://schemas.microsoft.com/office/drawing/2014/main" id="{4B29D98D-8BB8-5A98-06B1-AF40FF5D4731}"/>
+                </a:ext>
+              </a:extLst>
+            </p:cNvPr>
+            <p:cNvSpPr txBox="1"/>
+            <p:nvPr/>
+          </p:nvSpPr>
+          <p:spPr>
+            <a:xfrm>
+              <a:off x="2599003" y="579536"/>
+              <a:ext cx="2275695" cy="369332"/>
+            </a:xfrm>
+            <a:prstGeom prst="rect">
+              <a:avLst/>
+            </a:prstGeom>
+            <a:noFill/>
+          </p:spPr>
+          <p:txBody>
+            <a:bodyPr wrap="square">
+              <a:spAutoFit/>
+            </a:bodyPr>
+            <a:lstStyle/>
+            <a:p>
+              <a:r>
+                <a:rPr lang="es-ES" b="1" i="1" dirty="0" err="1"/>
+                <a:t>Sibinia</a:t>
+              </a:r>
+              <a:r>
+                <a:rPr lang="es-ES" b="1" i="1" dirty="0"/>
+                <a:t> </a:t>
+              </a:r>
+              <a:r>
+                <a:rPr lang="es-ES" b="1" i="1" dirty="0" err="1"/>
+                <a:t>fastigiata</a:t>
+              </a:r>
+              <a:endParaRPr lang="es-ES" b="1" i="1" dirty="0"/>
+            </a:p>
+          </p:txBody>
+        </p:sp>
+      </p:grpSp>
+      <p:grpSp>
+        <p:nvGrpSpPr>
+          <p:cNvPr id="43" name="Grupo 42">
+            <a:extLst>
+              <a:ext uri="{FF2B5EF4-FFF2-40B4-BE49-F238E27FC236}">
+                <a16:creationId xmlns:a16="http://schemas.microsoft.com/office/drawing/2014/main" id="{7D741AFE-4C8C-8DA1-C586-D5E2EE089D17}"/>
+              </a:ext>
+            </a:extLst>
+          </p:cNvPr>
+          <p:cNvGrpSpPr/>
+          <p:nvPr/>
+        </p:nvGrpSpPr>
+        <p:grpSpPr>
+          <a:xfrm>
+            <a:off x="5081638" y="298247"/>
+            <a:ext cx="3508337" cy="3058783"/>
+            <a:chOff x="2287807" y="181975"/>
+            <a:chExt cx="3508337" cy="3058783"/>
+          </a:xfrm>
+        </p:grpSpPr>
+        <p:sp>
+          <p:nvSpPr>
+            <p:cNvPr id="42" name="Rectángulo 41">
+              <a:extLst>
+                <a:ext uri="{FF2B5EF4-FFF2-40B4-BE49-F238E27FC236}">
+                  <a16:creationId xmlns:a16="http://schemas.microsoft.com/office/drawing/2014/main" id="{0CC6D62C-D97E-4FDF-0DEF-16B8314E9F81}"/>
+                </a:ext>
+              </a:extLst>
+            </p:cNvPr>
+            <p:cNvSpPr/>
+            <p:nvPr/>
+          </p:nvSpPr>
+          <p:spPr>
+            <a:xfrm>
+              <a:off x="2287807" y="181975"/>
+              <a:ext cx="3495479" cy="3058783"/>
+            </a:xfrm>
+            <a:prstGeom prst="rect">
+              <a:avLst/>
+            </a:prstGeom>
+            <a:solidFill>
+              <a:schemeClr val="bg1"/>
+            </a:solidFill>
+          </p:spPr>
+          <p:style>
+            <a:lnRef idx="2">
+              <a:schemeClr val="accent1">
+                <a:shade val="15000"/>
+              </a:schemeClr>
+            </a:lnRef>
+            <a:fillRef idx="1">
+              <a:schemeClr val="accent1"/>
+            </a:fillRef>
+            <a:effectRef idx="0">
+              <a:schemeClr val="accent1"/>
+            </a:effectRef>
+            <a:fontRef idx="minor">
+              <a:schemeClr val="lt1"/>
+            </a:fontRef>
+          </p:style>
+          <p:txBody>
+            <a:bodyPr rtlCol="0" anchor="ctr"/>
+            <a:lstStyle/>
+            <a:p>
+              <a:pPr algn="ctr"/>
+              <a:endParaRPr lang="es-ES" dirty="0"/>
+            </a:p>
+          </p:txBody>
+        </p:sp>
+        <p:pic>
+          <p:nvPicPr>
+            <p:cNvPr id="1036" name="Picture 12" descr="Periquito Común - eBird">
+              <a:extLst>
+                <a:ext uri="{FF2B5EF4-FFF2-40B4-BE49-F238E27FC236}">
+                  <a16:creationId xmlns:a16="http://schemas.microsoft.com/office/drawing/2014/main" id="{2F7051F3-7DB4-C3E4-72DD-12BC7D6E0285}"/>
+                </a:ext>
+              </a:extLst>
+            </p:cNvPr>
+            <p:cNvPicPr>
+              <a:picLocks noChangeAspect="1" noChangeArrowheads="1"/>
+            </p:cNvPicPr>
+            <p:nvPr/>
+          </p:nvPicPr>
+          <p:blipFill>
+            <a:blip r:embed="rId7">
+              <a:extLst>
+                <a:ext uri="{28A0092B-C50C-407E-A947-70E740481C1C}">
+                  <a14:useLocalDpi xmlns:a14="http://schemas.microsoft.com/office/drawing/2010/main" val="0"/>
+                </a:ext>
+              </a:extLst>
+            </a:blip>
+            <a:srcRect/>
+            <a:stretch>
+              <a:fillRect/>
+            </a:stretch>
+          </p:blipFill>
+          <p:spPr bwMode="auto">
+            <a:xfrm>
+              <a:off x="2395350" y="618436"/>
+              <a:ext cx="3289300" cy="2463800"/>
+            </a:xfrm>
+            <a:prstGeom prst="rect">
+              <a:avLst/>
+            </a:prstGeom>
+            <a:noFill/>
+            <a:extLst>
+              <a:ext uri="{909E8E84-426E-40DD-AFC4-6F175D3DCCD1}">
+                <a14:hiddenFill xmlns:a14="http://schemas.microsoft.com/office/drawing/2010/main">
+                  <a:solidFill>
+                    <a:srgbClr val="FFFFFF"/>
+                  </a:solidFill>
+                </a14:hiddenFill>
+              </a:ext>
+            </a:extLst>
+          </p:spPr>
+        </p:pic>
+        <p:sp>
+          <p:nvSpPr>
+            <p:cNvPr id="41" name="CuadroTexto 40">
+              <a:extLst>
+                <a:ext uri="{FF2B5EF4-FFF2-40B4-BE49-F238E27FC236}">
+                  <a16:creationId xmlns:a16="http://schemas.microsoft.com/office/drawing/2014/main" id="{77D8A4E2-9BCA-9172-32DE-7295C7749470}"/>
+                </a:ext>
+              </a:extLst>
+            </p:cNvPr>
+            <p:cNvSpPr txBox="1"/>
+            <p:nvPr/>
+          </p:nvSpPr>
+          <p:spPr>
+            <a:xfrm>
+              <a:off x="2287807" y="222290"/>
+              <a:ext cx="3508337" cy="369332"/>
+            </a:xfrm>
+            <a:prstGeom prst="rect">
+              <a:avLst/>
+            </a:prstGeom>
+            <a:noFill/>
+          </p:spPr>
+          <p:txBody>
+            <a:bodyPr wrap="square">
+              <a:spAutoFit/>
+            </a:bodyPr>
+            <a:lstStyle/>
+            <a:p>
+              <a:r>
+                <a:rPr lang="es-ES" b="1" i="1" dirty="0" err="1"/>
+                <a:t>Melopsittacus</a:t>
+              </a:r>
+              <a:r>
+                <a:rPr lang="es-ES" b="1" i="1" dirty="0"/>
+                <a:t> </a:t>
+              </a:r>
+              <a:r>
+                <a:rPr lang="es-ES" b="1" i="1" dirty="0" err="1"/>
+                <a:t>undulatus</a:t>
+              </a:r>
+              <a:r>
+                <a:rPr lang="es-ES" b="1" i="1" dirty="0"/>
+                <a:t> (UK)</a:t>
+              </a:r>
+            </a:p>
+          </p:txBody>
+        </p:sp>
+      </p:grpSp>
+      <p:grpSp>
+        <p:nvGrpSpPr>
+          <p:cNvPr id="44" name="Grupo 43">
+            <a:extLst>
+              <a:ext uri="{FF2B5EF4-FFF2-40B4-BE49-F238E27FC236}">
+                <a16:creationId xmlns:a16="http://schemas.microsoft.com/office/drawing/2014/main" id="{0D7C8A34-B968-7208-509E-BFCC7E16662A}"/>
+              </a:ext>
+            </a:extLst>
+          </p:cNvPr>
+          <p:cNvGrpSpPr/>
+          <p:nvPr/>
+        </p:nvGrpSpPr>
+        <p:grpSpPr>
+          <a:xfrm>
+            <a:off x="5169935" y="133178"/>
+            <a:ext cx="3741312" cy="3058783"/>
+            <a:chOff x="2171432" y="181975"/>
+            <a:chExt cx="3741312" cy="3058783"/>
+          </a:xfrm>
+        </p:grpSpPr>
+        <p:sp>
+          <p:nvSpPr>
+            <p:cNvPr id="45" name="Rectángulo 44">
+              <a:extLst>
+                <a:ext uri="{FF2B5EF4-FFF2-40B4-BE49-F238E27FC236}">
+                  <a16:creationId xmlns:a16="http://schemas.microsoft.com/office/drawing/2014/main" id="{DC86C9D5-D5AA-53F8-4ACB-B048481B60FA}"/>
+                </a:ext>
+              </a:extLst>
+            </p:cNvPr>
+            <p:cNvSpPr/>
+            <p:nvPr/>
+          </p:nvSpPr>
+          <p:spPr>
+            <a:xfrm>
+              <a:off x="2204682" y="181975"/>
+              <a:ext cx="3624937" cy="3058783"/>
+            </a:xfrm>
+            <a:prstGeom prst="rect">
+              <a:avLst/>
+            </a:prstGeom>
+            <a:solidFill>
+              <a:schemeClr val="bg1"/>
+            </a:solidFill>
+          </p:spPr>
+          <p:style>
+            <a:lnRef idx="2">
+              <a:schemeClr val="accent1">
+                <a:shade val="15000"/>
+              </a:schemeClr>
+            </a:lnRef>
+            <a:fillRef idx="1">
+              <a:schemeClr val="accent1"/>
+            </a:fillRef>
+            <a:effectRef idx="0">
+              <a:schemeClr val="accent1"/>
+            </a:effectRef>
+            <a:fontRef idx="minor">
+              <a:schemeClr val="lt1"/>
+            </a:fontRef>
+          </p:style>
+          <p:txBody>
+            <a:bodyPr rtlCol="0" anchor="ctr"/>
+            <a:lstStyle/>
+            <a:p>
+              <a:pPr algn="ctr"/>
+              <a:endParaRPr lang="es-ES" dirty="0"/>
+            </a:p>
+          </p:txBody>
+        </p:sp>
+        <p:pic>
+          <p:nvPicPr>
+            <p:cNvPr id="46" name="Picture 12" descr="Periquito Común - eBird">
+              <a:extLst>
+                <a:ext uri="{FF2B5EF4-FFF2-40B4-BE49-F238E27FC236}">
+                  <a16:creationId xmlns:a16="http://schemas.microsoft.com/office/drawing/2014/main" id="{F0F37ABD-B394-121C-82E6-D4E26335F081}"/>
+                </a:ext>
+              </a:extLst>
+            </p:cNvPr>
+            <p:cNvPicPr>
+              <a:picLocks noChangeAspect="1" noChangeArrowheads="1"/>
+            </p:cNvPicPr>
+            <p:nvPr/>
+          </p:nvPicPr>
+          <p:blipFill>
+            <a:blip r:embed="rId7">
+              <a:extLst>
+                <a:ext uri="{28A0092B-C50C-407E-A947-70E740481C1C}">
+                  <a14:useLocalDpi xmlns:a14="http://schemas.microsoft.com/office/drawing/2010/main" val="0"/>
+                </a:ext>
+              </a:extLst>
+            </a:blip>
+            <a:srcRect/>
+            <a:stretch>
+              <a:fillRect/>
+            </a:stretch>
+          </p:blipFill>
+          <p:spPr bwMode="auto">
+            <a:xfrm>
+              <a:off x="2395350" y="618436"/>
+              <a:ext cx="3289300" cy="2463800"/>
+            </a:xfrm>
+            <a:prstGeom prst="rect">
+              <a:avLst/>
+            </a:prstGeom>
+            <a:noFill/>
+            <a:extLst>
+              <a:ext uri="{909E8E84-426E-40DD-AFC4-6F175D3DCCD1}">
+                <a14:hiddenFill xmlns:a14="http://schemas.microsoft.com/office/drawing/2010/main">
+                  <a:solidFill>
+                    <a:srgbClr val="FFFFFF"/>
+                  </a:solidFill>
+                </a14:hiddenFill>
+              </a:ext>
+            </a:extLst>
+          </p:spPr>
+        </p:pic>
+        <p:sp>
+          <p:nvSpPr>
+            <p:cNvPr id="47" name="CuadroTexto 46">
+              <a:extLst>
+                <a:ext uri="{FF2B5EF4-FFF2-40B4-BE49-F238E27FC236}">
+                  <a16:creationId xmlns:a16="http://schemas.microsoft.com/office/drawing/2014/main" id="{628B18A5-4A97-3073-E180-DE9C736C5CC8}"/>
+                </a:ext>
+              </a:extLst>
+            </p:cNvPr>
+            <p:cNvSpPr txBox="1"/>
+            <p:nvPr/>
+          </p:nvSpPr>
+          <p:spPr>
+            <a:xfrm>
+              <a:off x="2171432" y="222290"/>
+              <a:ext cx="3741312" cy="369332"/>
+            </a:xfrm>
+            <a:prstGeom prst="rect">
+              <a:avLst/>
+            </a:prstGeom>
+            <a:noFill/>
+          </p:spPr>
+          <p:txBody>
+            <a:bodyPr wrap="square">
+              <a:spAutoFit/>
+            </a:bodyPr>
+            <a:lstStyle/>
+            <a:p>
+              <a:r>
+                <a:rPr lang="es-ES" b="1" i="1" dirty="0" err="1"/>
+                <a:t>Melopsittacus</a:t>
+              </a:r>
+              <a:r>
+                <a:rPr lang="es-ES" b="1" i="1" dirty="0"/>
+                <a:t> </a:t>
+              </a:r>
+              <a:r>
+                <a:rPr lang="es-ES" b="1" i="1" dirty="0" err="1"/>
+                <a:t>undulatus</a:t>
+              </a:r>
+              <a:r>
+                <a:rPr lang="es-ES" b="1" i="1" dirty="0"/>
+                <a:t> (Florida)</a:t>
+              </a:r>
+            </a:p>
+          </p:txBody>
+        </p:sp>
+      </p:grpSp>
+      <p:grpSp>
+        <p:nvGrpSpPr>
+          <p:cNvPr id="50" name="Grupo 49">
+            <a:extLst>
+              <a:ext uri="{FF2B5EF4-FFF2-40B4-BE49-F238E27FC236}">
+                <a16:creationId xmlns:a16="http://schemas.microsoft.com/office/drawing/2014/main" id="{F1E39D7D-6C09-B162-94C9-2B0D896F8445}"/>
+              </a:ext>
+            </a:extLst>
+          </p:cNvPr>
+          <p:cNvGrpSpPr/>
+          <p:nvPr/>
+        </p:nvGrpSpPr>
+        <p:grpSpPr>
+          <a:xfrm>
+            <a:off x="3567080" y="2211870"/>
+            <a:ext cx="3510512" cy="3810184"/>
+            <a:chOff x="857429" y="-532292"/>
+            <a:chExt cx="3510512" cy="3810184"/>
+          </a:xfrm>
+        </p:grpSpPr>
+        <p:sp>
+          <p:nvSpPr>
+            <p:cNvPr id="49" name="Rectángulo 48">
+              <a:extLst>
+                <a:ext uri="{FF2B5EF4-FFF2-40B4-BE49-F238E27FC236}">
+                  <a16:creationId xmlns:a16="http://schemas.microsoft.com/office/drawing/2014/main" id="{15373E93-D1DF-22C1-32BB-EEA87B8E610E}"/>
+                </a:ext>
+              </a:extLst>
+            </p:cNvPr>
+            <p:cNvSpPr/>
+            <p:nvPr/>
+          </p:nvSpPr>
+          <p:spPr>
+            <a:xfrm>
+              <a:off x="857429" y="-532292"/>
+              <a:ext cx="3510512" cy="3810184"/>
+            </a:xfrm>
+            <a:prstGeom prst="rect">
+              <a:avLst/>
+            </a:prstGeom>
+            <a:solidFill>
+              <a:schemeClr val="bg1"/>
+            </a:solidFill>
+          </p:spPr>
+          <p:style>
+            <a:lnRef idx="2">
+              <a:schemeClr val="accent1">
+                <a:shade val="15000"/>
+              </a:schemeClr>
+            </a:lnRef>
+            <a:fillRef idx="1">
+              <a:schemeClr val="accent1"/>
+            </a:fillRef>
+            <a:effectRef idx="0">
+              <a:schemeClr val="accent1"/>
+            </a:effectRef>
+            <a:fontRef idx="minor">
+              <a:schemeClr val="lt1"/>
+            </a:fontRef>
+          </p:style>
+          <p:txBody>
+            <a:bodyPr rtlCol="0" anchor="ctr"/>
+            <a:lstStyle/>
+            <a:p>
+              <a:pPr algn="ctr"/>
+              <a:endParaRPr lang="es-ES" dirty="0"/>
+            </a:p>
+          </p:txBody>
+        </p:sp>
+        <p:pic>
+          <p:nvPicPr>
+            <p:cNvPr id="1038" name="Picture 14" descr="Detailed View of Caulerpa Taxifolia Seaweed Exploring Marine Biodiversity  Stock Photo - Image of marine, caulerpaceae: 404554214">
+              <a:extLst>
+                <a:ext uri="{FF2B5EF4-FFF2-40B4-BE49-F238E27FC236}">
+                  <a16:creationId xmlns:a16="http://schemas.microsoft.com/office/drawing/2014/main" id="{469FE691-A735-D7FF-C211-807A5F6E8F77}"/>
+                </a:ext>
+              </a:extLst>
+            </p:cNvPr>
+            <p:cNvPicPr>
+              <a:picLocks noChangeAspect="1" noChangeArrowheads="1"/>
+            </p:cNvPicPr>
+            <p:nvPr/>
+          </p:nvPicPr>
+          <p:blipFill>
+            <a:blip r:embed="rId8">
+              <a:extLst>
+                <a:ext uri="{28A0092B-C50C-407E-A947-70E740481C1C}">
+                  <a14:useLocalDpi xmlns:a14="http://schemas.microsoft.com/office/drawing/2010/main" val="0"/>
+                </a:ext>
+              </a:extLst>
+            </a:blip>
+            <a:srcRect/>
+            <a:stretch>
+              <a:fillRect/>
+            </a:stretch>
+          </p:blipFill>
+          <p:spPr bwMode="auto">
+            <a:xfrm>
+              <a:off x="1056094" y="-71389"/>
+              <a:ext cx="3184786" cy="3184786"/>
+            </a:xfrm>
+            <a:prstGeom prst="rect">
+              <a:avLst/>
+            </a:prstGeom>
+            <a:noFill/>
+            <a:extLst>
+              <a:ext uri="{909E8E84-426E-40DD-AFC4-6F175D3DCCD1}">
+                <a14:hiddenFill xmlns:a14="http://schemas.microsoft.com/office/drawing/2010/main">
+                  <a:solidFill>
+                    <a:srgbClr val="FFFFFF"/>
+                  </a:solidFill>
+                </a14:hiddenFill>
+              </a:ext>
+            </a:extLst>
+          </p:spPr>
+        </p:pic>
+        <p:sp>
+          <p:nvSpPr>
+            <p:cNvPr id="48" name="CuadroTexto 47">
+              <a:extLst>
+                <a:ext uri="{FF2B5EF4-FFF2-40B4-BE49-F238E27FC236}">
+                  <a16:creationId xmlns:a16="http://schemas.microsoft.com/office/drawing/2014/main" id="{76E34E4A-1357-3694-D2FA-88C84C034831}"/>
+                </a:ext>
+              </a:extLst>
+            </p:cNvPr>
+            <p:cNvSpPr txBox="1"/>
+            <p:nvPr/>
+          </p:nvSpPr>
+          <p:spPr>
+            <a:xfrm>
+              <a:off x="1562793" y="-448887"/>
+              <a:ext cx="2054024" cy="369332"/>
+            </a:xfrm>
+            <a:prstGeom prst="rect">
+              <a:avLst/>
+            </a:prstGeom>
+            <a:noFill/>
+          </p:spPr>
+          <p:txBody>
+            <a:bodyPr wrap="none" rtlCol="0">
+              <a:spAutoFit/>
+            </a:bodyPr>
+            <a:lstStyle/>
+            <a:p>
+              <a:r>
+                <a:rPr lang="es-ES" b="1" i="1" dirty="0" err="1"/>
+                <a:t>Caulerpa</a:t>
+              </a:r>
+              <a:r>
+                <a:rPr lang="es-ES" b="1" i="1" dirty="0"/>
+                <a:t> </a:t>
+              </a:r>
+              <a:r>
+                <a:rPr lang="es-ES" b="1" i="1" dirty="0" err="1"/>
+                <a:t>taxifolia</a:t>
+              </a:r>
+              <a:endParaRPr lang="es-ES" b="1" i="1" dirty="0"/>
+            </a:p>
+          </p:txBody>
+        </p:sp>
+      </p:grpSp>
     </p:spTree>
     <p:extLst>
       <p:ext uri="{BB962C8B-B14F-4D97-AF65-F5344CB8AC3E}">
@@ -3980,7 +5075,7 @@
                             </p:stCondLst>
                             <p:childTnLst>
                               <p:par>
-                                <p:cTn id="9" presetID="1" presetClass="exit" presetSubtype="0" fill="hold" grpId="1" nodeType="clickEffect">
+                                <p:cTn id="9" presetID="1" presetClass="entr" presetSubtype="0" fill="hold" nodeType="clickEffect">
                                   <p:stCondLst>
                                     <p:cond delay="0"/>
                                   </p:stCondLst>
@@ -3993,14 +5088,14 @@
                                           </p:stCondLst>
                                         </p:cTn>
                                         <p:tgtEl>
-                                          <p:spTgt spid="11"/>
+                                          <p:spTgt spid="8"/>
                                         </p:tgtEl>
                                         <p:attrNameLst>
                                           <p:attrName>style.visibility</p:attrName>
                                         </p:attrNameLst>
                                       </p:cBhvr>
                                       <p:to>
-                                        <p:strVal val="hidden"/>
+                                        <p:strVal val="visible"/>
                                       </p:to>
                                     </p:set>
                                   </p:childTnLst>
@@ -4025,7 +5120,7 @@
                             </p:stCondLst>
                             <p:childTnLst>
                               <p:par>
-                                <p:cTn id="13" presetID="1" presetClass="entr" presetSubtype="0" fill="hold" grpId="0" nodeType="clickEffect">
+                                <p:cTn id="13" presetID="1" presetClass="exit" presetSubtype="0" fill="hold" nodeType="clickEffect">
                                   <p:stCondLst>
                                     <p:cond delay="0"/>
                                   </p:stCondLst>
@@ -4038,14 +5133,14 @@
                                           </p:stCondLst>
                                         </p:cTn>
                                         <p:tgtEl>
-                                          <p:spTgt spid="12"/>
+                                          <p:spTgt spid="8"/>
                                         </p:tgtEl>
                                         <p:attrNameLst>
                                           <p:attrName>style.visibility</p:attrName>
                                         </p:attrNameLst>
                                       </p:cBhvr>
                                       <p:to>
-                                        <p:strVal val="visible"/>
+                                        <p:strVal val="hidden"/>
                                       </p:to>
                                     </p:set>
                                   </p:childTnLst>
@@ -4083,7 +5178,7 @@
                                           </p:stCondLst>
                                         </p:cTn>
                                         <p:tgtEl>
-                                          <p:spTgt spid="12"/>
+                                          <p:spTgt spid="11"/>
                                         </p:tgtEl>
                                         <p:attrNameLst>
                                           <p:attrName>style.visibility</p:attrName>
@@ -4128,7 +5223,7 @@
                                           </p:stCondLst>
                                         </p:cTn>
                                         <p:tgtEl>
-                                          <p:spTgt spid="13"/>
+                                          <p:spTgt spid="12"/>
                                         </p:tgtEl>
                                         <p:attrNameLst>
                                           <p:attrName>style.visibility</p:attrName>
@@ -4160,7 +5255,7 @@
                             </p:stCondLst>
                             <p:childTnLst>
                               <p:par>
-                                <p:cTn id="25" presetID="1" presetClass="exit" presetSubtype="0" fill="hold" grpId="1" nodeType="clickEffect">
+                                <p:cTn id="25" presetID="1" presetClass="entr" presetSubtype="0" fill="hold" nodeType="clickEffect">
                                   <p:stCondLst>
                                     <p:cond delay="0"/>
                                   </p:stCondLst>
@@ -4173,14 +5268,14 @@
                                           </p:stCondLst>
                                         </p:cTn>
                                         <p:tgtEl>
-                                          <p:spTgt spid="13"/>
+                                          <p:spTgt spid="35"/>
                                         </p:tgtEl>
                                         <p:attrNameLst>
                                           <p:attrName>style.visibility</p:attrName>
                                         </p:attrNameLst>
                                       </p:cBhvr>
                                       <p:to>
-                                        <p:strVal val="hidden"/>
+                                        <p:strVal val="visible"/>
                                       </p:to>
                                     </p:set>
                                   </p:childTnLst>
@@ -4205,7 +5300,7 @@
                             </p:stCondLst>
                             <p:childTnLst>
                               <p:par>
-                                <p:cTn id="29" presetID="1" presetClass="entr" presetSubtype="0" fill="hold" nodeType="clickEffect">
+                                <p:cTn id="29" presetID="1" presetClass="exit" presetSubtype="0" fill="hold" nodeType="clickEffect">
                                   <p:stCondLst>
                                     <p:cond delay="0"/>
                                   </p:stCondLst>
@@ -4218,14 +5313,14 @@
                                           </p:stCondLst>
                                         </p:cTn>
                                         <p:tgtEl>
-                                          <p:spTgt spid="17"/>
+                                          <p:spTgt spid="35"/>
                                         </p:tgtEl>
                                         <p:attrNameLst>
                                           <p:attrName>style.visibility</p:attrName>
                                         </p:attrNameLst>
                                       </p:cBhvr>
                                       <p:to>
-                                        <p:strVal val="visible"/>
+                                        <p:strVal val="hidden"/>
                                       </p:to>
                                     </p:set>
                                   </p:childTnLst>
@@ -4250,7 +5345,7 @@
                             </p:stCondLst>
                             <p:childTnLst>
                               <p:par>
-                                <p:cTn id="33" presetID="1" presetClass="exit" presetSubtype="0" fill="hold" nodeType="clickEffect">
+                                <p:cTn id="33" presetID="1" presetClass="exit" presetSubtype="0" fill="hold" grpId="1" nodeType="clickEffect">
                                   <p:stCondLst>
                                     <p:cond delay="0"/>
                                   </p:stCondLst>
@@ -4263,7 +5358,7 @@
                                           </p:stCondLst>
                                         </p:cTn>
                                         <p:tgtEl>
-                                          <p:spTgt spid="17"/>
+                                          <p:spTgt spid="12"/>
                                         </p:tgtEl>
                                         <p:attrNameLst>
                                           <p:attrName>style.visibility</p:attrName>
@@ -4308,7 +5403,7 @@
                                           </p:stCondLst>
                                         </p:cTn>
                                         <p:tgtEl>
-                                          <p:spTgt spid="23"/>
+                                          <p:spTgt spid="13"/>
                                         </p:tgtEl>
                                         <p:attrNameLst>
                                           <p:attrName>style.visibility</p:attrName>
@@ -4340,7 +5435,7 @@
                             </p:stCondLst>
                             <p:childTnLst>
                               <p:par>
-                                <p:cTn id="41" presetID="1" presetClass="exit" presetSubtype="0" fill="hold" grpId="1" nodeType="clickEffect">
+                                <p:cTn id="41" presetID="1" presetClass="entr" presetSubtype="0" fill="hold" nodeType="clickEffect">
                                   <p:stCondLst>
                                     <p:cond delay="0"/>
                                   </p:stCondLst>
@@ -4353,14 +5448,14 @@
                                           </p:stCondLst>
                                         </p:cTn>
                                         <p:tgtEl>
-                                          <p:spTgt spid="23"/>
+                                          <p:spTgt spid="39"/>
                                         </p:tgtEl>
                                         <p:attrNameLst>
                                           <p:attrName>style.visibility</p:attrName>
                                         </p:attrNameLst>
                                       </p:cBhvr>
                                       <p:to>
-                                        <p:strVal val="hidden"/>
+                                        <p:strVal val="visible"/>
                                       </p:to>
                                     </p:set>
                                   </p:childTnLst>
@@ -4385,7 +5480,7 @@
                             </p:stCondLst>
                             <p:childTnLst>
                               <p:par>
-                                <p:cTn id="45" presetID="1" presetClass="entr" presetSubtype="0" fill="hold" nodeType="clickEffect">
+                                <p:cTn id="45" presetID="1" presetClass="exit" presetSubtype="0" fill="hold" nodeType="clickEffect">
                                   <p:stCondLst>
                                     <p:cond delay="0"/>
                                   </p:stCondLst>
@@ -4398,14 +5493,14 @@
                                           </p:stCondLst>
                                         </p:cTn>
                                         <p:tgtEl>
-                                          <p:spTgt spid="18"/>
+                                          <p:spTgt spid="39"/>
                                         </p:tgtEl>
                                         <p:attrNameLst>
                                           <p:attrName>style.visibility</p:attrName>
                                         </p:attrNameLst>
                                       </p:cBhvr>
                                       <p:to>
-                                        <p:strVal val="visible"/>
+                                        <p:strVal val="hidden"/>
                                       </p:to>
                                     </p:set>
                                   </p:childTnLst>
@@ -4430,7 +5525,7 @@
                             </p:stCondLst>
                             <p:childTnLst>
                               <p:par>
-                                <p:cTn id="49" presetID="1" presetClass="exit" presetSubtype="0" fill="hold" nodeType="clickEffect">
+                                <p:cTn id="49" presetID="1" presetClass="exit" presetSubtype="0" fill="hold" grpId="1" nodeType="clickEffect">
                                   <p:stCondLst>
                                     <p:cond delay="0"/>
                                   </p:stCondLst>
@@ -4443,7 +5538,7 @@
                                           </p:stCondLst>
                                         </p:cTn>
                                         <p:tgtEl>
-                                          <p:spTgt spid="18"/>
+                                          <p:spTgt spid="13"/>
                                         </p:tgtEl>
                                         <p:attrNameLst>
                                           <p:attrName>style.visibility</p:attrName>
@@ -4475,7 +5570,7 @@
                             </p:stCondLst>
                             <p:childTnLst>
                               <p:par>
-                                <p:cTn id="53" presetID="1" presetClass="entr" presetSubtype="0" fill="hold" grpId="0" nodeType="clickEffect">
+                                <p:cTn id="53" presetID="1" presetClass="entr" presetSubtype="0" fill="hold" nodeType="clickEffect">
                                   <p:stCondLst>
                                     <p:cond delay="0"/>
                                   </p:stCondLst>
@@ -4488,7 +5583,7 @@
                                           </p:stCondLst>
                                         </p:cTn>
                                         <p:tgtEl>
-                                          <p:spTgt spid="24"/>
+                                          <p:spTgt spid="17"/>
                                         </p:tgtEl>
                                         <p:attrNameLst>
                                           <p:attrName>style.visibility</p:attrName>
@@ -4520,7 +5615,7 @@
                             </p:stCondLst>
                             <p:childTnLst>
                               <p:par>
-                                <p:cTn id="57" presetID="1" presetClass="exit" presetSubtype="0" fill="hold" grpId="1" nodeType="clickEffect">
+                                <p:cTn id="57" presetID="1" presetClass="entr" presetSubtype="0" fill="hold" nodeType="clickEffect">
                                   <p:stCondLst>
                                     <p:cond delay="0"/>
                                   </p:stCondLst>
@@ -4533,14 +5628,14 @@
                                           </p:stCondLst>
                                         </p:cTn>
                                         <p:tgtEl>
-                                          <p:spTgt spid="24"/>
+                                          <p:spTgt spid="43"/>
                                         </p:tgtEl>
                                         <p:attrNameLst>
                                           <p:attrName>style.visibility</p:attrName>
                                         </p:attrNameLst>
                                       </p:cBhvr>
                                       <p:to>
-                                        <p:strVal val="hidden"/>
+                                        <p:strVal val="visible"/>
                                       </p:to>
                                     </p:set>
                                   </p:childTnLst>
@@ -4565,7 +5660,7 @@
                             </p:stCondLst>
                             <p:childTnLst>
                               <p:par>
-                                <p:cTn id="61" presetID="1" presetClass="entr" presetSubtype="0" fill="hold" grpId="0" nodeType="clickEffect">
+                                <p:cTn id="61" presetID="1" presetClass="exit" presetSubtype="0" fill="hold" nodeType="clickEffect">
                                   <p:stCondLst>
                                     <p:cond delay="0"/>
                                   </p:stCondLst>
@@ -4578,14 +5673,14 @@
                                           </p:stCondLst>
                                         </p:cTn>
                                         <p:tgtEl>
-                                          <p:spTgt spid="25"/>
+                                          <p:spTgt spid="43"/>
                                         </p:tgtEl>
                                         <p:attrNameLst>
                                           <p:attrName>style.visibility</p:attrName>
                                         </p:attrNameLst>
                                       </p:cBhvr>
                                       <p:to>
-                                        <p:strVal val="visible"/>
+                                        <p:strVal val="hidden"/>
                                       </p:to>
                                     </p:set>
                                   </p:childTnLst>
@@ -4610,7 +5705,7 @@
                             </p:stCondLst>
                             <p:childTnLst>
                               <p:par>
-                                <p:cTn id="65" presetID="1" presetClass="exit" presetSubtype="0" fill="hold" grpId="1" nodeType="clickEffect">
+                                <p:cTn id="65" presetID="1" presetClass="exit" presetSubtype="0" fill="hold" nodeType="clickEffect">
                                   <p:stCondLst>
                                     <p:cond delay="0"/>
                                   </p:stCondLst>
@@ -4623,7 +5718,7 @@
                                           </p:stCondLst>
                                         </p:cTn>
                                         <p:tgtEl>
-                                          <p:spTgt spid="25"/>
+                                          <p:spTgt spid="17"/>
                                         </p:tgtEl>
                                         <p:attrNameLst>
                                           <p:attrName>style.visibility</p:attrName>
@@ -4668,7 +5763,7 @@
                                           </p:stCondLst>
                                         </p:cTn>
                                         <p:tgtEl>
-                                          <p:spTgt spid="28"/>
+                                          <p:spTgt spid="23"/>
                                         </p:tgtEl>
                                         <p:attrNameLst>
                                           <p:attrName>style.visibility</p:attrName>
@@ -4700,7 +5795,7 @@
                             </p:stCondLst>
                             <p:childTnLst>
                               <p:par>
-                                <p:cTn id="73" presetID="1" presetClass="entr" presetSubtype="0" fill="hold" grpId="0" nodeType="clickEffect">
+                                <p:cTn id="73" presetID="1" presetClass="exit" presetSubtype="0" fill="hold" grpId="1" nodeType="clickEffect">
                                   <p:stCondLst>
                                     <p:cond delay="0"/>
                                   </p:stCondLst>
@@ -4713,14 +5808,14 @@
                                           </p:stCondLst>
                                         </p:cTn>
                                         <p:tgtEl>
-                                          <p:spTgt spid="29"/>
+                                          <p:spTgt spid="23"/>
                                         </p:tgtEl>
                                         <p:attrNameLst>
                                           <p:attrName>style.visibility</p:attrName>
                                         </p:attrNameLst>
                                       </p:cBhvr>
                                       <p:to>
-                                        <p:strVal val="visible"/>
+                                        <p:strVal val="hidden"/>
                                       </p:to>
                                     </p:set>
                                   </p:childTnLst>
@@ -4745,7 +5840,7 @@
                             </p:stCondLst>
                             <p:childTnLst>
                               <p:par>
-                                <p:cTn id="77" presetID="1" presetClass="entr" presetSubtype="0" fill="hold" grpId="0" nodeType="clickEffect">
+                                <p:cTn id="77" presetID="1" presetClass="entr" presetSubtype="0" fill="hold" nodeType="clickEffect">
                                   <p:stCondLst>
                                     <p:cond delay="0"/>
                                   </p:stCondLst>
@@ -4758,7 +5853,7 @@
                                           </p:stCondLst>
                                         </p:cTn>
                                         <p:tgtEl>
-                                          <p:spTgt spid="30"/>
+                                          <p:spTgt spid="18"/>
                                         </p:tgtEl>
                                         <p:attrNameLst>
                                           <p:attrName>style.visibility</p:attrName>
@@ -4790,7 +5885,7 @@
                             </p:stCondLst>
                             <p:childTnLst>
                               <p:par>
-                                <p:cTn id="81" presetID="1" presetClass="entr" presetSubtype="0" fill="hold" grpId="0" nodeType="clickEffect">
+                                <p:cTn id="81" presetID="1" presetClass="exit" presetSubtype="0" fill="hold" nodeType="clickEffect">
                                   <p:stCondLst>
                                     <p:cond delay="0"/>
                                   </p:stCondLst>
@@ -4803,14 +5898,14 @@
                                           </p:stCondLst>
                                         </p:cTn>
                                         <p:tgtEl>
-                                          <p:spTgt spid="31"/>
+                                          <p:spTgt spid="18"/>
                                         </p:tgtEl>
                                         <p:attrNameLst>
                                           <p:attrName>style.visibility</p:attrName>
                                         </p:attrNameLst>
                                       </p:cBhvr>
                                       <p:to>
-                                        <p:strVal val="visible"/>
+                                        <p:strVal val="hidden"/>
                                       </p:to>
                                     </p:set>
                                   </p:childTnLst>
@@ -4848,7 +5943,7 @@
                                           </p:stCondLst>
                                         </p:cTn>
                                         <p:tgtEl>
-                                          <p:spTgt spid="32"/>
+                                          <p:spTgt spid="24"/>
                                         </p:tgtEl>
                                         <p:attrNameLst>
                                           <p:attrName>style.visibility</p:attrName>
@@ -4880,7 +5975,7 @@
                             </p:stCondLst>
                             <p:childTnLst>
                               <p:par>
-                                <p:cTn id="89" presetID="1" presetClass="exit" presetSubtype="0" fill="hold" grpId="0" nodeType="clickEffect">
+                                <p:cTn id="89" presetID="1" presetClass="entr" presetSubtype="0" fill="hold" nodeType="clickEffect">
                                   <p:stCondLst>
                                     <p:cond delay="0"/>
                                   </p:stCondLst>
@@ -4888,6 +5983,546 @@
                                     <p:set>
                                       <p:cBhvr>
                                         <p:cTn id="90" dur="1" fill="hold">
+                                          <p:stCondLst>
+                                            <p:cond delay="0"/>
+                                          </p:stCondLst>
+                                        </p:cTn>
+                                        <p:tgtEl>
+                                          <p:spTgt spid="44"/>
+                                        </p:tgtEl>
+                                        <p:attrNameLst>
+                                          <p:attrName>style.visibility</p:attrName>
+                                        </p:attrNameLst>
+                                      </p:cBhvr>
+                                      <p:to>
+                                        <p:strVal val="visible"/>
+                                      </p:to>
+                                    </p:set>
+                                  </p:childTnLst>
+                                </p:cTn>
+                              </p:par>
+                            </p:childTnLst>
+                          </p:cTn>
+                        </p:par>
+                      </p:childTnLst>
+                    </p:cTn>
+                  </p:par>
+                  <p:par>
+                    <p:cTn id="91" fill="hold">
+                      <p:stCondLst>
+                        <p:cond delay="indefinite"/>
+                      </p:stCondLst>
+                      <p:childTnLst>
+                        <p:par>
+                          <p:cTn id="92" fill="hold">
+                            <p:stCondLst>
+                              <p:cond delay="0"/>
+                            </p:stCondLst>
+                            <p:childTnLst>
+                              <p:par>
+                                <p:cTn id="93" presetID="1" presetClass="exit" presetSubtype="0" fill="hold" nodeType="clickEffect">
+                                  <p:stCondLst>
+                                    <p:cond delay="0"/>
+                                  </p:stCondLst>
+                                  <p:childTnLst>
+                                    <p:set>
+                                      <p:cBhvr>
+                                        <p:cTn id="94" dur="1" fill="hold">
+                                          <p:stCondLst>
+                                            <p:cond delay="0"/>
+                                          </p:stCondLst>
+                                        </p:cTn>
+                                        <p:tgtEl>
+                                          <p:spTgt spid="44"/>
+                                        </p:tgtEl>
+                                        <p:attrNameLst>
+                                          <p:attrName>style.visibility</p:attrName>
+                                        </p:attrNameLst>
+                                      </p:cBhvr>
+                                      <p:to>
+                                        <p:strVal val="hidden"/>
+                                      </p:to>
+                                    </p:set>
+                                  </p:childTnLst>
+                                </p:cTn>
+                              </p:par>
+                            </p:childTnLst>
+                          </p:cTn>
+                        </p:par>
+                      </p:childTnLst>
+                    </p:cTn>
+                  </p:par>
+                  <p:par>
+                    <p:cTn id="95" fill="hold">
+                      <p:stCondLst>
+                        <p:cond delay="indefinite"/>
+                      </p:stCondLst>
+                      <p:childTnLst>
+                        <p:par>
+                          <p:cTn id="96" fill="hold">
+                            <p:stCondLst>
+                              <p:cond delay="0"/>
+                            </p:stCondLst>
+                            <p:childTnLst>
+                              <p:par>
+                                <p:cTn id="97" presetID="1" presetClass="exit" presetSubtype="0" fill="hold" grpId="1" nodeType="clickEffect">
+                                  <p:stCondLst>
+                                    <p:cond delay="0"/>
+                                  </p:stCondLst>
+                                  <p:childTnLst>
+                                    <p:set>
+                                      <p:cBhvr>
+                                        <p:cTn id="98" dur="1" fill="hold">
+                                          <p:stCondLst>
+                                            <p:cond delay="0"/>
+                                          </p:stCondLst>
+                                        </p:cTn>
+                                        <p:tgtEl>
+                                          <p:spTgt spid="24"/>
+                                        </p:tgtEl>
+                                        <p:attrNameLst>
+                                          <p:attrName>style.visibility</p:attrName>
+                                        </p:attrNameLst>
+                                      </p:cBhvr>
+                                      <p:to>
+                                        <p:strVal val="hidden"/>
+                                      </p:to>
+                                    </p:set>
+                                  </p:childTnLst>
+                                </p:cTn>
+                              </p:par>
+                            </p:childTnLst>
+                          </p:cTn>
+                        </p:par>
+                      </p:childTnLst>
+                    </p:cTn>
+                  </p:par>
+                  <p:par>
+                    <p:cTn id="99" fill="hold">
+                      <p:stCondLst>
+                        <p:cond delay="indefinite"/>
+                      </p:stCondLst>
+                      <p:childTnLst>
+                        <p:par>
+                          <p:cTn id="100" fill="hold">
+                            <p:stCondLst>
+                              <p:cond delay="0"/>
+                            </p:stCondLst>
+                            <p:childTnLst>
+                              <p:par>
+                                <p:cTn id="101" presetID="1" presetClass="entr" presetSubtype="0" fill="hold" grpId="0" nodeType="clickEffect">
+                                  <p:stCondLst>
+                                    <p:cond delay="0"/>
+                                  </p:stCondLst>
+                                  <p:childTnLst>
+                                    <p:set>
+                                      <p:cBhvr>
+                                        <p:cTn id="102" dur="1" fill="hold">
+                                          <p:stCondLst>
+                                            <p:cond delay="0"/>
+                                          </p:stCondLst>
+                                        </p:cTn>
+                                        <p:tgtEl>
+                                          <p:spTgt spid="25"/>
+                                        </p:tgtEl>
+                                        <p:attrNameLst>
+                                          <p:attrName>style.visibility</p:attrName>
+                                        </p:attrNameLst>
+                                      </p:cBhvr>
+                                      <p:to>
+                                        <p:strVal val="visible"/>
+                                      </p:to>
+                                    </p:set>
+                                  </p:childTnLst>
+                                </p:cTn>
+                              </p:par>
+                            </p:childTnLst>
+                          </p:cTn>
+                        </p:par>
+                      </p:childTnLst>
+                    </p:cTn>
+                  </p:par>
+                  <p:par>
+                    <p:cTn id="103" fill="hold">
+                      <p:stCondLst>
+                        <p:cond delay="indefinite"/>
+                      </p:stCondLst>
+                      <p:childTnLst>
+                        <p:par>
+                          <p:cTn id="104" fill="hold">
+                            <p:stCondLst>
+                              <p:cond delay="0"/>
+                            </p:stCondLst>
+                            <p:childTnLst>
+                              <p:par>
+                                <p:cTn id="105" presetID="1" presetClass="entr" presetSubtype="0" fill="hold" nodeType="clickEffect">
+                                  <p:stCondLst>
+                                    <p:cond delay="0"/>
+                                  </p:stCondLst>
+                                  <p:childTnLst>
+                                    <p:set>
+                                      <p:cBhvr>
+                                        <p:cTn id="106" dur="1" fill="hold">
+                                          <p:stCondLst>
+                                            <p:cond delay="0"/>
+                                          </p:stCondLst>
+                                        </p:cTn>
+                                        <p:tgtEl>
+                                          <p:spTgt spid="50"/>
+                                        </p:tgtEl>
+                                        <p:attrNameLst>
+                                          <p:attrName>style.visibility</p:attrName>
+                                        </p:attrNameLst>
+                                      </p:cBhvr>
+                                      <p:to>
+                                        <p:strVal val="visible"/>
+                                      </p:to>
+                                    </p:set>
+                                  </p:childTnLst>
+                                </p:cTn>
+                              </p:par>
+                            </p:childTnLst>
+                          </p:cTn>
+                        </p:par>
+                      </p:childTnLst>
+                    </p:cTn>
+                  </p:par>
+                  <p:par>
+                    <p:cTn id="107" fill="hold">
+                      <p:stCondLst>
+                        <p:cond delay="indefinite"/>
+                      </p:stCondLst>
+                      <p:childTnLst>
+                        <p:par>
+                          <p:cTn id="108" fill="hold">
+                            <p:stCondLst>
+                              <p:cond delay="0"/>
+                            </p:stCondLst>
+                            <p:childTnLst>
+                              <p:par>
+                                <p:cTn id="109" presetID="1" presetClass="exit" presetSubtype="0" fill="hold" nodeType="clickEffect">
+                                  <p:stCondLst>
+                                    <p:cond delay="0"/>
+                                  </p:stCondLst>
+                                  <p:childTnLst>
+                                    <p:set>
+                                      <p:cBhvr>
+                                        <p:cTn id="110" dur="1" fill="hold">
+                                          <p:stCondLst>
+                                            <p:cond delay="0"/>
+                                          </p:stCondLst>
+                                        </p:cTn>
+                                        <p:tgtEl>
+                                          <p:spTgt spid="50"/>
+                                        </p:tgtEl>
+                                        <p:attrNameLst>
+                                          <p:attrName>style.visibility</p:attrName>
+                                        </p:attrNameLst>
+                                      </p:cBhvr>
+                                      <p:to>
+                                        <p:strVal val="hidden"/>
+                                      </p:to>
+                                    </p:set>
+                                  </p:childTnLst>
+                                </p:cTn>
+                              </p:par>
+                            </p:childTnLst>
+                          </p:cTn>
+                        </p:par>
+                      </p:childTnLst>
+                    </p:cTn>
+                  </p:par>
+                  <p:par>
+                    <p:cTn id="111" fill="hold">
+                      <p:stCondLst>
+                        <p:cond delay="indefinite"/>
+                      </p:stCondLst>
+                      <p:childTnLst>
+                        <p:par>
+                          <p:cTn id="112" fill="hold">
+                            <p:stCondLst>
+                              <p:cond delay="0"/>
+                            </p:stCondLst>
+                            <p:childTnLst>
+                              <p:par>
+                                <p:cTn id="113" presetID="1" presetClass="exit" presetSubtype="0" fill="hold" grpId="1" nodeType="clickEffect">
+                                  <p:stCondLst>
+                                    <p:cond delay="0"/>
+                                  </p:stCondLst>
+                                  <p:childTnLst>
+                                    <p:set>
+                                      <p:cBhvr>
+                                        <p:cTn id="114" dur="1" fill="hold">
+                                          <p:stCondLst>
+                                            <p:cond delay="0"/>
+                                          </p:stCondLst>
+                                        </p:cTn>
+                                        <p:tgtEl>
+                                          <p:spTgt spid="25"/>
+                                        </p:tgtEl>
+                                        <p:attrNameLst>
+                                          <p:attrName>style.visibility</p:attrName>
+                                        </p:attrNameLst>
+                                      </p:cBhvr>
+                                      <p:to>
+                                        <p:strVal val="hidden"/>
+                                      </p:to>
+                                    </p:set>
+                                  </p:childTnLst>
+                                </p:cTn>
+                              </p:par>
+                            </p:childTnLst>
+                          </p:cTn>
+                        </p:par>
+                      </p:childTnLst>
+                    </p:cTn>
+                  </p:par>
+                  <p:par>
+                    <p:cTn id="115" fill="hold">
+                      <p:stCondLst>
+                        <p:cond delay="indefinite"/>
+                      </p:stCondLst>
+                      <p:childTnLst>
+                        <p:par>
+                          <p:cTn id="116" fill="hold">
+                            <p:stCondLst>
+                              <p:cond delay="0"/>
+                            </p:stCondLst>
+                            <p:childTnLst>
+                              <p:par>
+                                <p:cTn id="117" presetID="1" presetClass="entr" presetSubtype="0" fill="hold" grpId="0" nodeType="clickEffect">
+                                  <p:stCondLst>
+                                    <p:cond delay="0"/>
+                                  </p:stCondLst>
+                                  <p:childTnLst>
+                                    <p:set>
+                                      <p:cBhvr>
+                                        <p:cTn id="118" dur="1" fill="hold">
+                                          <p:stCondLst>
+                                            <p:cond delay="0"/>
+                                          </p:stCondLst>
+                                        </p:cTn>
+                                        <p:tgtEl>
+                                          <p:spTgt spid="28"/>
+                                        </p:tgtEl>
+                                        <p:attrNameLst>
+                                          <p:attrName>style.visibility</p:attrName>
+                                        </p:attrNameLst>
+                                      </p:cBhvr>
+                                      <p:to>
+                                        <p:strVal val="visible"/>
+                                      </p:to>
+                                    </p:set>
+                                  </p:childTnLst>
+                                </p:cTn>
+                              </p:par>
+                            </p:childTnLst>
+                          </p:cTn>
+                        </p:par>
+                      </p:childTnLst>
+                    </p:cTn>
+                  </p:par>
+                  <p:par>
+                    <p:cTn id="119" fill="hold">
+                      <p:stCondLst>
+                        <p:cond delay="indefinite"/>
+                      </p:stCondLst>
+                      <p:childTnLst>
+                        <p:par>
+                          <p:cTn id="120" fill="hold">
+                            <p:stCondLst>
+                              <p:cond delay="0"/>
+                            </p:stCondLst>
+                            <p:childTnLst>
+                              <p:par>
+                                <p:cTn id="121" presetID="1" presetClass="entr" presetSubtype="0" fill="hold" grpId="0" nodeType="clickEffect">
+                                  <p:stCondLst>
+                                    <p:cond delay="0"/>
+                                  </p:stCondLst>
+                                  <p:childTnLst>
+                                    <p:set>
+                                      <p:cBhvr>
+                                        <p:cTn id="122" dur="1" fill="hold">
+                                          <p:stCondLst>
+                                            <p:cond delay="0"/>
+                                          </p:stCondLst>
+                                        </p:cTn>
+                                        <p:tgtEl>
+                                          <p:spTgt spid="29"/>
+                                        </p:tgtEl>
+                                        <p:attrNameLst>
+                                          <p:attrName>style.visibility</p:attrName>
+                                        </p:attrNameLst>
+                                      </p:cBhvr>
+                                      <p:to>
+                                        <p:strVal val="visible"/>
+                                      </p:to>
+                                    </p:set>
+                                  </p:childTnLst>
+                                </p:cTn>
+                              </p:par>
+                            </p:childTnLst>
+                          </p:cTn>
+                        </p:par>
+                      </p:childTnLst>
+                    </p:cTn>
+                  </p:par>
+                  <p:par>
+                    <p:cTn id="123" fill="hold">
+                      <p:stCondLst>
+                        <p:cond delay="indefinite"/>
+                      </p:stCondLst>
+                      <p:childTnLst>
+                        <p:par>
+                          <p:cTn id="124" fill="hold">
+                            <p:stCondLst>
+                              <p:cond delay="0"/>
+                            </p:stCondLst>
+                            <p:childTnLst>
+                              <p:par>
+                                <p:cTn id="125" presetID="1" presetClass="entr" presetSubtype="0" fill="hold" grpId="0" nodeType="clickEffect">
+                                  <p:stCondLst>
+                                    <p:cond delay="0"/>
+                                  </p:stCondLst>
+                                  <p:childTnLst>
+                                    <p:set>
+                                      <p:cBhvr>
+                                        <p:cTn id="126" dur="1" fill="hold">
+                                          <p:stCondLst>
+                                            <p:cond delay="0"/>
+                                          </p:stCondLst>
+                                        </p:cTn>
+                                        <p:tgtEl>
+                                          <p:spTgt spid="30"/>
+                                        </p:tgtEl>
+                                        <p:attrNameLst>
+                                          <p:attrName>style.visibility</p:attrName>
+                                        </p:attrNameLst>
+                                      </p:cBhvr>
+                                      <p:to>
+                                        <p:strVal val="visible"/>
+                                      </p:to>
+                                    </p:set>
+                                  </p:childTnLst>
+                                </p:cTn>
+                              </p:par>
+                            </p:childTnLst>
+                          </p:cTn>
+                        </p:par>
+                      </p:childTnLst>
+                    </p:cTn>
+                  </p:par>
+                  <p:par>
+                    <p:cTn id="127" fill="hold">
+                      <p:stCondLst>
+                        <p:cond delay="indefinite"/>
+                      </p:stCondLst>
+                      <p:childTnLst>
+                        <p:par>
+                          <p:cTn id="128" fill="hold">
+                            <p:stCondLst>
+                              <p:cond delay="0"/>
+                            </p:stCondLst>
+                            <p:childTnLst>
+                              <p:par>
+                                <p:cTn id="129" presetID="1" presetClass="entr" presetSubtype="0" fill="hold" grpId="0" nodeType="clickEffect">
+                                  <p:stCondLst>
+                                    <p:cond delay="0"/>
+                                  </p:stCondLst>
+                                  <p:childTnLst>
+                                    <p:set>
+                                      <p:cBhvr>
+                                        <p:cTn id="130" dur="1" fill="hold">
+                                          <p:stCondLst>
+                                            <p:cond delay="0"/>
+                                          </p:stCondLst>
+                                        </p:cTn>
+                                        <p:tgtEl>
+                                          <p:spTgt spid="31"/>
+                                        </p:tgtEl>
+                                        <p:attrNameLst>
+                                          <p:attrName>style.visibility</p:attrName>
+                                        </p:attrNameLst>
+                                      </p:cBhvr>
+                                      <p:to>
+                                        <p:strVal val="visible"/>
+                                      </p:to>
+                                    </p:set>
+                                  </p:childTnLst>
+                                </p:cTn>
+                              </p:par>
+                            </p:childTnLst>
+                          </p:cTn>
+                        </p:par>
+                      </p:childTnLst>
+                    </p:cTn>
+                  </p:par>
+                  <p:par>
+                    <p:cTn id="131" fill="hold">
+                      <p:stCondLst>
+                        <p:cond delay="indefinite"/>
+                      </p:stCondLst>
+                      <p:childTnLst>
+                        <p:par>
+                          <p:cTn id="132" fill="hold">
+                            <p:stCondLst>
+                              <p:cond delay="0"/>
+                            </p:stCondLst>
+                            <p:childTnLst>
+                              <p:par>
+                                <p:cTn id="133" presetID="1" presetClass="entr" presetSubtype="0" fill="hold" grpId="0" nodeType="clickEffect">
+                                  <p:stCondLst>
+                                    <p:cond delay="0"/>
+                                  </p:stCondLst>
+                                  <p:childTnLst>
+                                    <p:set>
+                                      <p:cBhvr>
+                                        <p:cTn id="134" dur="1" fill="hold">
+                                          <p:stCondLst>
+                                            <p:cond delay="0"/>
+                                          </p:stCondLst>
+                                        </p:cTn>
+                                        <p:tgtEl>
+                                          <p:spTgt spid="32"/>
+                                        </p:tgtEl>
+                                        <p:attrNameLst>
+                                          <p:attrName>style.visibility</p:attrName>
+                                        </p:attrNameLst>
+                                      </p:cBhvr>
+                                      <p:to>
+                                        <p:strVal val="visible"/>
+                                      </p:to>
+                                    </p:set>
+                                  </p:childTnLst>
+                                </p:cTn>
+                              </p:par>
+                            </p:childTnLst>
+                          </p:cTn>
+                        </p:par>
+                      </p:childTnLst>
+                    </p:cTn>
+                  </p:par>
+                  <p:par>
+                    <p:cTn id="135" fill="hold">
+                      <p:stCondLst>
+                        <p:cond delay="indefinite"/>
+                      </p:stCondLst>
+                      <p:childTnLst>
+                        <p:par>
+                          <p:cTn id="136" fill="hold">
+                            <p:stCondLst>
+                              <p:cond delay="0"/>
+                            </p:stCondLst>
+                            <p:childTnLst>
+                              <p:par>
+                                <p:cTn id="137" presetID="1" presetClass="exit" presetSubtype="0" fill="hold" grpId="0" nodeType="clickEffect">
+                                  <p:stCondLst>
+                                    <p:cond delay="0"/>
+                                  </p:stCondLst>
+                                  <p:childTnLst>
+                                    <p:set>
+                                      <p:cBhvr>
+                                        <p:cTn id="138" dur="1" fill="hold">
                                           <p:stCondLst>
                                             <p:cond delay="0"/>
                                           </p:stCondLst>
@@ -4913,26 +6548,26 @@
                     </p:cTn>
                   </p:par>
                   <p:par>
-                    <p:cTn id="91" fill="hold">
+                    <p:cTn id="139" fill="hold">
                       <p:stCondLst>
                         <p:cond delay="indefinite"/>
                       </p:stCondLst>
                       <p:childTnLst>
                         <p:par>
-                          <p:cTn id="92" fill="hold">
+                          <p:cTn id="140" fill="hold">
                             <p:stCondLst>
                               <p:cond delay="0"/>
                             </p:stCondLst>
                             <p:childTnLst>
                               <p:par>
-                                <p:cTn id="93" presetID="1" presetClass="exit" presetSubtype="0" fill="hold" grpId="0" nodeType="clickEffect">
+                                <p:cTn id="141" presetID="1" presetClass="exit" presetSubtype="0" fill="hold" grpId="0" nodeType="clickEffect">
                                   <p:stCondLst>
                                     <p:cond delay="0"/>
                                   </p:stCondLst>
                                   <p:childTnLst>
                                     <p:set>
                                       <p:cBhvr>
-                                        <p:cTn id="94" dur="1" fill="hold">
+                                        <p:cTn id="142" dur="1" fill="hold">
                                           <p:stCondLst>
                                             <p:cond delay="0"/>
                                           </p:stCondLst>
